--- a/Materjalid/Day3 M Visuaalid Andmelugu/Visualiseerimine päev 3.pptx
+++ b/Materjalid/Day3 M Visuaalid Andmelugu/Visualiseerimine päev 3.pptx
@@ -118,6 +118,11 @@
       </a:defRPr>
     </a:lvl9pPr>
   </p:defaultTextStyle>
+  <p:extLst>
+    <p:ext uri="{EFAFB233-063F-42B5-8137-9DF3F51BA10A}">
+      <p15:sldGuideLst xmlns:p15="http://schemas.microsoft.com/office/powerpoint/2012/main"/>
+    </p:ext>
+  </p:extLst>
 </p:presentation>
 </file>
 
@@ -282,6 +287,13 @@
             <a:schemeClr val="lt1"/>
           </a:fontRef>
         </p:style>
+        <p:txBody>
+          <a:bodyPr/>
+          <a:lstStyle/>
+          <a:p>
+            <a:endParaRPr lang="et-EE"/>
+          </a:p>
+        </p:txBody>
       </p:sp>
       <p:sp>
         <p:nvSpPr>
@@ -322,6 +334,13 @@
             <a:schemeClr val="lt1"/>
           </a:fontRef>
         </p:style>
+        <p:txBody>
+          <a:bodyPr/>
+          <a:lstStyle/>
+          <a:p>
+            <a:endParaRPr lang="et-EE"/>
+          </a:p>
+        </p:txBody>
       </p:sp>
       <p:sp>
         <p:nvSpPr>
@@ -452,7 +471,7 @@
           <a:p>
             <a:fld id="{0351B17E-BCCC-43D6-AB44-9C55EEECE1D8}" type="datetimeFigureOut">
               <a:rPr lang="en-GB" smtClean="0"/>
-              <a:t>28/08/2026</a:t>
+              <a:t>01/09/2026</a:t>
             </a:fld>
             <a:endParaRPr lang="en-GB"/>
           </a:p>
@@ -622,7 +641,7 @@
           <a:p>
             <a:fld id="{0351B17E-BCCC-43D6-AB44-9C55EEECE1D8}" type="datetimeFigureOut">
               <a:rPr lang="en-GB" smtClean="0"/>
-              <a:t>28/08/2026</a:t>
+              <a:t>01/09/2026</a:t>
             </a:fld>
             <a:endParaRPr lang="en-GB"/>
           </a:p>
@@ -802,7 +821,7 @@
           <a:p>
             <a:fld id="{0351B17E-BCCC-43D6-AB44-9C55EEECE1D8}" type="datetimeFigureOut">
               <a:rPr lang="en-GB" smtClean="0"/>
-              <a:t>28/08/2026</a:t>
+              <a:t>01/09/2026</a:t>
             </a:fld>
             <a:endParaRPr lang="en-GB"/>
           </a:p>
@@ -972,7 +991,7 @@
           <a:p>
             <a:fld id="{0351B17E-BCCC-43D6-AB44-9C55EEECE1D8}" type="datetimeFigureOut">
               <a:rPr lang="en-GB" smtClean="0"/>
-              <a:t>28/08/2026</a:t>
+              <a:t>01/09/2026</a:t>
             </a:fld>
             <a:endParaRPr lang="en-GB"/>
           </a:p>
@@ -1230,7 +1249,7 @@
           <a:p>
             <a:fld id="{0351B17E-BCCC-43D6-AB44-9C55EEECE1D8}" type="datetimeFigureOut">
               <a:rPr lang="en-GB" smtClean="0"/>
-              <a:t>28/08/2026</a:t>
+              <a:t>01/09/2026</a:t>
             </a:fld>
             <a:endParaRPr lang="en-GB"/>
           </a:p>
@@ -1518,7 +1537,7 @@
           <a:p>
             <a:fld id="{0351B17E-BCCC-43D6-AB44-9C55EEECE1D8}" type="datetimeFigureOut">
               <a:rPr lang="en-GB" smtClean="0"/>
-              <a:t>28/08/2026</a:t>
+              <a:t>01/09/2026</a:t>
             </a:fld>
             <a:endParaRPr lang="en-GB"/>
           </a:p>
@@ -1960,7 +1979,7 @@
           <a:p>
             <a:fld id="{0351B17E-BCCC-43D6-AB44-9C55EEECE1D8}" type="datetimeFigureOut">
               <a:rPr lang="en-GB" smtClean="0"/>
-              <a:t>28/08/2026</a:t>
+              <a:t>01/09/2026</a:t>
             </a:fld>
             <a:endParaRPr lang="en-GB"/>
           </a:p>
@@ -2078,7 +2097,7 @@
           <a:p>
             <a:fld id="{0351B17E-BCCC-43D6-AB44-9C55EEECE1D8}" type="datetimeFigureOut">
               <a:rPr lang="en-GB" smtClean="0"/>
-              <a:t>28/08/2026</a:t>
+              <a:t>01/09/2026</a:t>
             </a:fld>
             <a:endParaRPr lang="en-GB"/>
           </a:p>
@@ -2173,7 +2192,7 @@
           <a:p>
             <a:fld id="{0351B17E-BCCC-43D6-AB44-9C55EEECE1D8}" type="datetimeFigureOut">
               <a:rPr lang="en-GB" smtClean="0"/>
-              <a:t>28/08/2026</a:t>
+              <a:t>01/09/2026</a:t>
             </a:fld>
             <a:endParaRPr lang="en-GB"/>
           </a:p>
@@ -2461,7 +2480,7 @@
           <a:p>
             <a:fld id="{0351B17E-BCCC-43D6-AB44-9C55EEECE1D8}" type="datetimeFigureOut">
               <a:rPr lang="en-GB" smtClean="0"/>
-              <a:t>28/08/2026</a:t>
+              <a:t>01/09/2026</a:t>
             </a:fld>
             <a:endParaRPr lang="en-GB"/>
           </a:p>
@@ -2734,7 +2753,7 @@
           <a:p>
             <a:fld id="{0351B17E-BCCC-43D6-AB44-9C55EEECE1D8}" type="datetimeFigureOut">
               <a:rPr lang="en-GB" smtClean="0"/>
-              <a:t>28/08/2026</a:t>
+              <a:t>01/09/2026</a:t>
             </a:fld>
             <a:endParaRPr lang="en-GB"/>
           </a:p>
@@ -2859,6 +2878,13 @@
             <a:schemeClr val="lt1"/>
           </a:fontRef>
         </p:style>
+        <p:txBody>
+          <a:bodyPr/>
+          <a:lstStyle/>
+          <a:p>
+            <a:endParaRPr lang="et-EE"/>
+          </a:p>
+        </p:txBody>
       </p:sp>
       <p:sp>
         <p:nvSpPr>
@@ -2932,6 +2958,13 @@
             <a:schemeClr val="lt1"/>
           </a:fontRef>
         </p:style>
+        <p:txBody>
+          <a:bodyPr/>
+          <a:lstStyle/>
+          <a:p>
+            <a:endParaRPr lang="et-EE"/>
+          </a:p>
+        </p:txBody>
       </p:sp>
       <p:sp>
         <p:nvSpPr>
@@ -3031,7 +3064,7 @@
           <a:p>
             <a:fld id="{0351B17E-BCCC-43D6-AB44-9C55EEECE1D8}" type="datetimeFigureOut">
               <a:rPr lang="en-GB" smtClean="0"/>
-              <a:t>28/08/2026</a:t>
+              <a:t>01/09/2026</a:t>
             </a:fld>
             <a:endParaRPr lang="en-GB"/>
           </a:p>
